--- a/2020/06-Jun/netstandard-update/NetStandard20Adoption.pptx
+++ b/2020/06-Jun/netstandard-update/NetStandard20Adoption.pptx
@@ -8,9 +8,9 @@
     <p:handoutMasterId r:id="rId5"/>
   </p:handoutMasterIdLst>
   <p:sldIdLst>
-    <p:sldId id="259" r:id="rId2"/>
-    <p:sldId id="260" r:id="rId3"/>
-    <p:sldId id="258" r:id="rId4"/>
+    <p:sldId id="258" r:id="rId2"/>
+    <p:sldId id="259" r:id="rId3"/>
+    <p:sldId id="260" r:id="rId4"/>
   </p:sldIdLst>
   <p:sldSz cx="12192000" cy="6858000"/>
   <p:notesSz cx="6858000" cy="9144000"/>
@@ -4137,7 +4137,7 @@
           <a:p>
             <a:fld id="{7F432E50-72F1-4859-9EA2-93129C85895D}" type="datetimeFigureOut">
               <a:rPr lang="en-US" smtClean="0"/>
-              <a:t>7/8/2020</a:t>
+              <a:t>7/9/2020</a:t>
             </a:fld>
             <a:endParaRPr lang="en-US"/>
           </a:p>
@@ -4379,7 +4379,7 @@
           <a:p>
             <a:fld id="{E2A1D626-6A33-4EC8-9C4A-DBEBF0762508}" type="datetimeFigureOut">
               <a:rPr lang="en-US" smtClean="0"/>
-              <a:t>7/8/2020</a:t>
+              <a:t>7/9/2020</a:t>
             </a:fld>
             <a:endParaRPr lang="en-US"/>
           </a:p>
@@ -4577,7 +4577,7 @@
           <a:p>
             <a:fld id="{E2A1D626-6A33-4EC8-9C4A-DBEBF0762508}" type="datetimeFigureOut">
               <a:rPr lang="en-US" smtClean="0"/>
-              <a:t>7/8/2020</a:t>
+              <a:t>7/9/2020</a:t>
             </a:fld>
             <a:endParaRPr lang="en-US"/>
           </a:p>
@@ -4785,7 +4785,7 @@
           <a:p>
             <a:fld id="{E2A1D626-6A33-4EC8-9C4A-DBEBF0762508}" type="datetimeFigureOut">
               <a:rPr lang="en-US" smtClean="0"/>
-              <a:t>7/8/2020</a:t>
+              <a:t>7/9/2020</a:t>
             </a:fld>
             <a:endParaRPr lang="en-US"/>
           </a:p>
@@ -4989,7 +4989,7 @@
           <a:p>
             <a:fld id="{E2A1D626-6A33-4EC8-9C4A-DBEBF0762508}" type="datetimeFigureOut">
               <a:rPr lang="en-US" smtClean="0"/>
-              <a:t>7/8/2020</a:t>
+              <a:t>7/9/2020</a:t>
             </a:fld>
             <a:endParaRPr lang="en-US"/>
           </a:p>
@@ -5264,7 +5264,7 @@
           <a:p>
             <a:fld id="{E2A1D626-6A33-4EC8-9C4A-DBEBF0762508}" type="datetimeFigureOut">
               <a:rPr lang="en-US" smtClean="0"/>
-              <a:t>7/8/2020</a:t>
+              <a:t>7/9/2020</a:t>
             </a:fld>
             <a:endParaRPr lang="en-US"/>
           </a:p>
@@ -5529,7 +5529,7 @@
           <a:p>
             <a:fld id="{E2A1D626-6A33-4EC8-9C4A-DBEBF0762508}" type="datetimeFigureOut">
               <a:rPr lang="en-US" smtClean="0"/>
-              <a:t>7/8/2020</a:t>
+              <a:t>7/9/2020</a:t>
             </a:fld>
             <a:endParaRPr lang="en-US"/>
           </a:p>
@@ -5941,7 +5941,7 @@
           <a:p>
             <a:fld id="{E2A1D626-6A33-4EC8-9C4A-DBEBF0762508}" type="datetimeFigureOut">
               <a:rPr lang="en-US" smtClean="0"/>
-              <a:t>7/8/2020</a:t>
+              <a:t>7/9/2020</a:t>
             </a:fld>
             <a:endParaRPr lang="en-US"/>
           </a:p>
@@ -6082,7 +6082,7 @@
           <a:p>
             <a:fld id="{E2A1D626-6A33-4EC8-9C4A-DBEBF0762508}" type="datetimeFigureOut">
               <a:rPr lang="en-US" smtClean="0"/>
-              <a:t>7/8/2020</a:t>
+              <a:t>7/9/2020</a:t>
             </a:fld>
             <a:endParaRPr lang="en-US"/>
           </a:p>
@@ -6204,7 +6204,7 @@
             <a:fld id="{E2A1D626-6A33-4EC8-9C4A-DBEBF0762508}" type="datetimeFigureOut">
               <a:rPr lang="en-US" smtClean="0"/>
               <a:pPr/>
-              <a:t>7/8/2020</a:t>
+              <a:t>7/9/2020</a:t>
             </a:fld>
             <a:endParaRPr lang="en-US"/>
           </a:p>
@@ -6532,7 +6532,7 @@
           <a:p>
             <a:fld id="{E2A1D626-6A33-4EC8-9C4A-DBEBF0762508}" type="datetimeFigureOut">
               <a:rPr lang="en-US" smtClean="0"/>
-              <a:t>7/8/2020</a:t>
+              <a:t>7/9/2020</a:t>
             </a:fld>
             <a:endParaRPr lang="en-US"/>
           </a:p>
@@ -6820,7 +6820,7 @@
           <a:p>
             <a:fld id="{E2A1D626-6A33-4EC8-9C4A-DBEBF0762508}" type="datetimeFigureOut">
               <a:rPr lang="en-US" smtClean="0"/>
-              <a:t>7/8/2020</a:t>
+              <a:t>7/9/2020</a:t>
             </a:fld>
             <a:endParaRPr lang="en-US"/>
           </a:p>
@@ -7121,7 +7121,7 @@
           <a:p>
             <a:fld id="{E2A1D626-6A33-4EC8-9C4A-DBEBF0762508}" type="datetimeFigureOut">
               <a:rPr lang="en-US" smtClean="0"/>
-              <a:t>7/8/2020</a:t>
+              <a:t>7/9/2020</a:t>
             </a:fld>
             <a:endParaRPr lang="en-US" dirty="0"/>
           </a:p>
@@ -7538,6 +7538,208 @@
           <a:chExt cx="0" cy="0"/>
         </a:xfrm>
       </p:grpSpPr>
+      <p:sp>
+        <p:nvSpPr>
+          <p:cNvPr id="7" name="Rectangle 6">
+            <a:extLst>
+              <a:ext uri="{FF2B5EF4-FFF2-40B4-BE49-F238E27FC236}">
+                <a16:creationId xmlns:a16="http://schemas.microsoft.com/office/drawing/2014/main" id="{43C1FDA2-C192-42A1-AFC4-78D6E07B7E46}"/>
+              </a:ext>
+            </a:extLst>
+          </p:cNvPr>
+          <p:cNvSpPr/>
+          <p:nvPr/>
+        </p:nvSpPr>
+        <p:spPr>
+          <a:xfrm>
+            <a:off x="0" y="0"/>
+            <a:ext cx="12192000" cy="6858000"/>
+          </a:xfrm>
+          <a:prstGeom prst="rect">
+            <a:avLst/>
+          </a:prstGeom>
+          <a:gradFill flip="none" rotWithShape="1">
+            <a:gsLst>
+              <a:gs pos="0">
+                <a:srgbClr val="595959"/>
+              </a:gs>
+              <a:gs pos="100000">
+                <a:srgbClr val="262626"/>
+              </a:gs>
+            </a:gsLst>
+            <a:path path="circle">
+              <a:fillToRect l="50000" t="50000" r="50000" b="50000"/>
+            </a:path>
+            <a:tileRect/>
+          </a:gradFill>
+        </p:spPr>
+        <p:style>
+          <a:lnRef idx="2">
+            <a:schemeClr val="accent1">
+              <a:shade val="50000"/>
+            </a:schemeClr>
+          </a:lnRef>
+          <a:fillRef idx="1">
+            <a:schemeClr val="accent1"/>
+          </a:fillRef>
+          <a:effectRef idx="0">
+            <a:schemeClr val="accent1"/>
+          </a:effectRef>
+          <a:fontRef idx="minor">
+            <a:schemeClr val="lt1"/>
+          </a:fontRef>
+        </p:style>
+        <p:txBody>
+          <a:bodyPr rtlCol="0" anchor="ctr"/>
+          <a:lstStyle/>
+          <a:p>
+            <a:pPr algn="ctr"/>
+            <a:endParaRPr lang="en-US"/>
+          </a:p>
+        </p:txBody>
+      </p:sp>
+      <p:sp>
+        <p:nvSpPr>
+          <p:cNvPr id="3" name="Title 2">
+            <a:extLst>
+              <a:ext uri="{FF2B5EF4-FFF2-40B4-BE49-F238E27FC236}">
+                <a16:creationId xmlns:a16="http://schemas.microsoft.com/office/drawing/2014/main" id="{30DF767A-C16F-4D13-A536-416C97B26813}"/>
+              </a:ext>
+            </a:extLst>
+          </p:cNvPr>
+          <p:cNvSpPr>
+            <a:spLocks noGrp="1"/>
+          </p:cNvSpPr>
+          <p:nvPr>
+            <p:ph type="title"/>
+          </p:nvPr>
+        </p:nvSpPr>
+        <p:spPr/>
+        <p:txBody>
+          <a:bodyPr/>
+          <a:lstStyle/>
+          <a:p>
+            <a:r>
+              <a:rPr lang="en-US" dirty="0"/>
+              <a:t>Adoption rate for .NET Standard*</a:t>
+            </a:r>
+          </a:p>
+        </p:txBody>
+      </p:sp>
+      <p:sp>
+        <p:nvSpPr>
+          <p:cNvPr id="5" name="TextBox 4">
+            <a:extLst>
+              <a:ext uri="{FF2B5EF4-FFF2-40B4-BE49-F238E27FC236}">
+                <a16:creationId xmlns:a16="http://schemas.microsoft.com/office/drawing/2014/main" id="{2646ACAC-5337-4532-9CE7-5F6CB2CFCAD6}"/>
+              </a:ext>
+            </a:extLst>
+          </p:cNvPr>
+          <p:cNvSpPr txBox="1"/>
+          <p:nvPr/>
+        </p:nvSpPr>
+        <p:spPr>
+          <a:xfrm>
+            <a:off x="838200" y="5946130"/>
+            <a:ext cx="10515600" cy="461665"/>
+          </a:xfrm>
+          <a:prstGeom prst="rect">
+            <a:avLst/>
+          </a:prstGeom>
+          <a:noFill/>
+        </p:spPr>
+        <p:txBody>
+          <a:bodyPr wrap="square">
+            <a:spAutoFit/>
+          </a:bodyPr>
+          <a:lstStyle/>
+          <a:p>
+            <a:pPr marL="0" indent="0">
+              <a:buNone/>
+            </a:pPr>
+            <a:r>
+              <a:rPr lang="en-US" sz="2400" dirty="0">
+                <a:solidFill>
+                  <a:schemeClr val="bg1"/>
+                </a:solidFill>
+              </a:rPr>
+              <a:t>*Numbers exclude Microsoft owned packages and non-library packages</a:t>
+            </a:r>
+          </a:p>
+        </p:txBody>
+      </p:sp>
+      <p:sp>
+        <p:nvSpPr>
+          <p:cNvPr id="4" name="Content Placeholder 3">
+            <a:extLst>
+              <a:ext uri="{FF2B5EF4-FFF2-40B4-BE49-F238E27FC236}">
+                <a16:creationId xmlns:a16="http://schemas.microsoft.com/office/drawing/2014/main" id="{4D38C870-1513-419E-B424-A03A06F78977}"/>
+              </a:ext>
+            </a:extLst>
+          </p:cNvPr>
+          <p:cNvSpPr>
+            <a:spLocks noGrp="1"/>
+          </p:cNvSpPr>
+          <p:nvPr>
+            <p:ph idx="1"/>
+          </p:nvPr>
+        </p:nvSpPr>
+        <p:spPr/>
+        <p:txBody>
+          <a:bodyPr>
+            <a:normAutofit/>
+          </a:bodyPr>
+          <a:lstStyle/>
+          <a:p>
+            <a:r>
+              <a:rPr lang="en-US" sz="4000" dirty="0"/>
+              <a:t>77% of the top 1,000 packages</a:t>
+            </a:r>
+          </a:p>
+          <a:p>
+            <a:r>
+              <a:rPr lang="en-US" sz="4000" dirty="0"/>
+              <a:t>59% of all active packages (updated within the last 180 days)</a:t>
+            </a:r>
+          </a:p>
+          <a:p>
+            <a:r>
+              <a:rPr lang="en-US" sz="4000" dirty="0"/>
+              <a:t>40% of all packages</a:t>
+            </a:r>
+          </a:p>
+        </p:txBody>
+      </p:sp>
+    </p:spTree>
+    <p:extLst>
+      <p:ext uri="{BB962C8B-B14F-4D97-AF65-F5344CB8AC3E}">
+        <p14:creationId xmlns:p14="http://schemas.microsoft.com/office/powerpoint/2010/main" val="2535937197"/>
+      </p:ext>
+    </p:extLst>
+  </p:cSld>
+  <p:clrMapOvr>
+    <a:masterClrMapping/>
+  </p:clrMapOvr>
+</p:sld>
+</file>
+
+<file path=ppt/slides/slide2.xml><?xml version="1.0" encoding="utf-8"?>
+<p:sld xmlns:a="http://schemas.openxmlformats.org/drawingml/2006/main" xmlns:r="http://schemas.openxmlformats.org/officeDocument/2006/relationships" xmlns:p="http://schemas.openxmlformats.org/presentationml/2006/main">
+  <p:cSld>
+    <p:spTree>
+      <p:nvGrpSpPr>
+        <p:cNvPr id="1" name=""/>
+        <p:cNvGrpSpPr/>
+        <p:nvPr/>
+      </p:nvGrpSpPr>
+      <p:grpSpPr>
+        <a:xfrm>
+          <a:off x="0" y="0"/>
+          <a:ext cx="0" cy="0"/>
+          <a:chOff x="0" y="0"/>
+          <a:chExt cx="0" cy="0"/>
+        </a:xfrm>
+      </p:grpSpPr>
       <p:graphicFrame>
         <p:nvGraphicFramePr>
           <p:cNvPr id="2" name="Chart 1">
@@ -7581,7 +7783,7 @@
 </p:sld>
 </file>
 
-<file path=ppt/slides/slide2.xml><?xml version="1.0" encoding="utf-8"?>
+<file path=ppt/slides/slide3.xml><?xml version="1.0" encoding="utf-8"?>
 <p:sld xmlns:a="http://schemas.openxmlformats.org/drawingml/2006/main" xmlns:r="http://schemas.openxmlformats.org/officeDocument/2006/relationships" xmlns:p="http://schemas.openxmlformats.org/presentationml/2006/main">
   <p:cSld>
     <p:spTree>
@@ -7638,220 +7840,18 @@
   <p:clrMapOvr>
     <a:masterClrMapping/>
   </p:clrMapOvr>
-  <mc:AlternateContent xmlns:mc="http://schemas.openxmlformats.org/markup-compatibility/2006">
-    <mc:Choice xmlns:p159="http://schemas.microsoft.com/office/powerpoint/2015/09/main" Requires="p159">
+  <mc:AlternateContent xmlns:mc="http://schemas.openxmlformats.org/markup-compatibility/2006" xmlns:p159="http://schemas.microsoft.com/office/powerpoint/2015/09/main">
+    <mc:Choice Requires="p159">
       <p:transition xmlns:p14="http://schemas.microsoft.com/office/powerpoint/2010/main" spd="slow" p14:dur="2000">
         <p159:morph option="byObject"/>
       </p:transition>
     </mc:Choice>
-    <mc:Fallback>
+    <mc:Fallback xmlns="">
       <p:transition spd="slow">
         <p:fade/>
       </p:transition>
     </mc:Fallback>
   </mc:AlternateContent>
-</p:sld>
-</file>
-
-<file path=ppt/slides/slide3.xml><?xml version="1.0" encoding="utf-8"?>
-<p:sld xmlns:a="http://schemas.openxmlformats.org/drawingml/2006/main" xmlns:r="http://schemas.openxmlformats.org/officeDocument/2006/relationships" xmlns:p="http://schemas.openxmlformats.org/presentationml/2006/main">
-  <p:cSld>
-    <p:spTree>
-      <p:nvGrpSpPr>
-        <p:cNvPr id="1" name=""/>
-        <p:cNvGrpSpPr/>
-        <p:nvPr/>
-      </p:nvGrpSpPr>
-      <p:grpSpPr>
-        <a:xfrm>
-          <a:off x="0" y="0"/>
-          <a:ext cx="0" cy="0"/>
-          <a:chOff x="0" y="0"/>
-          <a:chExt cx="0" cy="0"/>
-        </a:xfrm>
-      </p:grpSpPr>
-      <p:sp>
-        <p:nvSpPr>
-          <p:cNvPr id="7" name="Rectangle 6">
-            <a:extLst>
-              <a:ext uri="{FF2B5EF4-FFF2-40B4-BE49-F238E27FC236}">
-                <a16:creationId xmlns:a16="http://schemas.microsoft.com/office/drawing/2014/main" id="{43C1FDA2-C192-42A1-AFC4-78D6E07B7E46}"/>
-              </a:ext>
-            </a:extLst>
-          </p:cNvPr>
-          <p:cNvSpPr/>
-          <p:nvPr/>
-        </p:nvSpPr>
-        <p:spPr>
-          <a:xfrm>
-            <a:off x="0" y="0"/>
-            <a:ext cx="12192000" cy="6858000"/>
-          </a:xfrm>
-          <a:prstGeom prst="rect">
-            <a:avLst/>
-          </a:prstGeom>
-          <a:gradFill flip="none" rotWithShape="1">
-            <a:gsLst>
-              <a:gs pos="0">
-                <a:srgbClr val="595959"/>
-              </a:gs>
-              <a:gs pos="100000">
-                <a:srgbClr val="262626"/>
-              </a:gs>
-            </a:gsLst>
-            <a:path path="circle">
-              <a:fillToRect l="50000" t="50000" r="50000" b="50000"/>
-            </a:path>
-            <a:tileRect/>
-          </a:gradFill>
-        </p:spPr>
-        <p:style>
-          <a:lnRef idx="2">
-            <a:schemeClr val="accent1">
-              <a:shade val="50000"/>
-            </a:schemeClr>
-          </a:lnRef>
-          <a:fillRef idx="1">
-            <a:schemeClr val="accent1"/>
-          </a:fillRef>
-          <a:effectRef idx="0">
-            <a:schemeClr val="accent1"/>
-          </a:effectRef>
-          <a:fontRef idx="minor">
-            <a:schemeClr val="lt1"/>
-          </a:fontRef>
-        </p:style>
-        <p:txBody>
-          <a:bodyPr rtlCol="0" anchor="ctr"/>
-          <a:lstStyle/>
-          <a:p>
-            <a:pPr algn="ctr"/>
-            <a:endParaRPr lang="en-US"/>
-          </a:p>
-        </p:txBody>
-      </p:sp>
-      <p:sp>
-        <p:nvSpPr>
-          <p:cNvPr id="3" name="Title 2">
-            <a:extLst>
-              <a:ext uri="{FF2B5EF4-FFF2-40B4-BE49-F238E27FC236}">
-                <a16:creationId xmlns:a16="http://schemas.microsoft.com/office/drawing/2014/main" id="{30DF767A-C16F-4D13-A536-416C97B26813}"/>
-              </a:ext>
-            </a:extLst>
-          </p:cNvPr>
-          <p:cNvSpPr>
-            <a:spLocks noGrp="1"/>
-          </p:cNvSpPr>
-          <p:nvPr>
-            <p:ph type="title"/>
-          </p:nvPr>
-        </p:nvSpPr>
-        <p:spPr/>
-        <p:txBody>
-          <a:bodyPr/>
-          <a:lstStyle/>
-          <a:p>
-            <a:r>
-              <a:rPr lang="en-US" dirty="0"/>
-              <a:t>Adoption rate for .NET Standard*</a:t>
-            </a:r>
-          </a:p>
-        </p:txBody>
-      </p:sp>
-      <p:sp>
-        <p:nvSpPr>
-          <p:cNvPr id="5" name="TextBox 4">
-            <a:extLst>
-              <a:ext uri="{FF2B5EF4-FFF2-40B4-BE49-F238E27FC236}">
-                <a16:creationId xmlns:a16="http://schemas.microsoft.com/office/drawing/2014/main" id="{2646ACAC-5337-4532-9CE7-5F6CB2CFCAD6}"/>
-              </a:ext>
-            </a:extLst>
-          </p:cNvPr>
-          <p:cNvSpPr txBox="1"/>
-          <p:nvPr/>
-        </p:nvSpPr>
-        <p:spPr>
-          <a:xfrm>
-            <a:off x="838200" y="5946130"/>
-            <a:ext cx="10515600" cy="461665"/>
-          </a:xfrm>
-          <a:prstGeom prst="rect">
-            <a:avLst/>
-          </a:prstGeom>
-          <a:noFill/>
-        </p:spPr>
-        <p:txBody>
-          <a:bodyPr wrap="square">
-            <a:spAutoFit/>
-          </a:bodyPr>
-          <a:lstStyle/>
-          <a:p>
-            <a:pPr marL="0" indent="0">
-              <a:buNone/>
-            </a:pPr>
-            <a:r>
-              <a:rPr lang="en-US" sz="2400" dirty="0">
-                <a:solidFill>
-                  <a:schemeClr val="bg1"/>
-                </a:solidFill>
-              </a:rPr>
-              <a:t>*Numbers exclude Microsoft owned packages and non-library packages</a:t>
-            </a:r>
-          </a:p>
-        </p:txBody>
-      </p:sp>
-      <p:sp>
-        <p:nvSpPr>
-          <p:cNvPr id="4" name="Content Placeholder 3">
-            <a:extLst>
-              <a:ext uri="{FF2B5EF4-FFF2-40B4-BE49-F238E27FC236}">
-                <a16:creationId xmlns:a16="http://schemas.microsoft.com/office/drawing/2014/main" id="{4D38C870-1513-419E-B424-A03A06F78977}"/>
-              </a:ext>
-            </a:extLst>
-          </p:cNvPr>
-          <p:cNvSpPr>
-            <a:spLocks noGrp="1"/>
-          </p:cNvSpPr>
-          <p:nvPr>
-            <p:ph idx="1"/>
-          </p:nvPr>
-        </p:nvSpPr>
-        <p:spPr/>
-        <p:txBody>
-          <a:bodyPr>
-            <a:normAutofit/>
-          </a:bodyPr>
-          <a:lstStyle/>
-          <a:p>
-            <a:r>
-              <a:rPr lang="en-US" sz="4000" dirty="0"/>
-              <a:t>77% of the top 1,000 packages</a:t>
-            </a:r>
-          </a:p>
-          <a:p>
-            <a:r>
-              <a:rPr lang="en-US" sz="4000" dirty="0"/>
-              <a:t>59% of all active packages (updated within the last 180 days)</a:t>
-            </a:r>
-          </a:p>
-          <a:p>
-            <a:r>
-              <a:rPr lang="en-US" sz="4000" dirty="0"/>
-              <a:t>40% of all packages</a:t>
-            </a:r>
-          </a:p>
-        </p:txBody>
-      </p:sp>
-    </p:spTree>
-    <p:extLst>
-      <p:ext uri="{BB962C8B-B14F-4D97-AF65-F5344CB8AC3E}">
-        <p14:creationId xmlns:p14="http://schemas.microsoft.com/office/powerpoint/2010/main" val="2535937197"/>
-      </p:ext>
-    </p:extLst>
-  </p:cSld>
-  <p:clrMapOvr>
-    <a:masterClrMapping/>
-  </p:clrMapOvr>
 </p:sld>
 </file>
 
